--- a/domain-seminars/week07_vbp_data_management.pptx
+++ b/domain-seminars/week07_vbp_data_management.pptx
@@ -506,7 +506,7 @@
           <a:lstStyle/>
           <a:p>
             <a:r>
-              <a:t>Domain seminar for week 7: Why VBP Data Management is So Difficult. It follows the course pattern: basics and terminology, where the topic sits in industry and policy, reform goals, how analytics is deployed, and how analytics drives decisions. Replace this note with your own opening remarks.</a:t>
+              <a:t>Domain seminar for week 7: Why VBP Data Management is So Difficult. We will go through basics and terminology, where the topic is found across industry and policy, reform goals, how analytics is deployed, and how analytics drives decisions. Provide opening remarks here.</a:t>
             </a:r>
           </a:p>
         </p:txBody>

--- a/domain-seminars/week07_vbp_data_management.pptx
+++ b/domain-seminars/week07_vbp_data_management.pptx
@@ -11,6 +11,7 @@
     <p:sldId id="269" r:id="rId20"/>
     <p:sldId id="270" r:id="rId21"/>
     <p:sldId id="271" r:id="rId22"/>
+    <p:sldId id="272" r:id="rId11"/>
   </p:sldIdLst>
   <p:notesMasterIdLst>
     <p:notesMasterId r:id="rId12"/>
@@ -857,6 +858,76 @@
           <a:p>
             <a:r>
               <a:t>Physicians lose trust in a scorecard fast when it ranks them on noise. Show the denominator next to every rate. Practices whose intervals overlap the network average should not be singled out; the ones clearly outside it, in either direction, are where coaching or recognition belongs.</a:t>
+            </a:r>
+          </a:p>
+        </p:txBody>
+      </p:sp>
+      <p:sp>
+        <p:nvSpPr>
+          <p:cNvPr id="4" name="Slide Number Placeholder 3"/>
+          <p:cNvSpPr>
+            <a:spLocks noGrp="1"/>
+          </p:cNvSpPr>
+          <p:nvPr>
+            <p:ph type="sldNum" idx="5" sz="quarter"/>
+          </p:nvPr>
+        </p:nvSpPr>
+        <p:spPr/>
+      </p:sp>
+    </p:spTree>
+  </p:cSld>
+  <p:clrMapOvr>
+    <a:masterClrMapping/>
+  </p:clrMapOvr>
+</p:notes>
+</file>
+
+<file path=ppt/notesSlides/notesSlide7.xml><?xml version="1.0" encoding="utf-8"?>
+<p:notes xmlns:a="http://schemas.openxmlformats.org/drawingml/2006/main" xmlns:p="http://schemas.openxmlformats.org/presentationml/2006/main" xmlns:r="http://schemas.openxmlformats.org/officeDocument/2006/relationships">
+  <p:cSld>
+    <p:spTree>
+      <p:nvGrpSpPr>
+        <p:cNvPr id="1" name=""/>
+        <p:cNvGrpSpPr/>
+        <p:nvPr/>
+      </p:nvGrpSpPr>
+      <p:grpSpPr>
+        <a:xfrm>
+          <a:off x="0" y="0"/>
+          <a:ext cx="0" cy="0"/>
+          <a:chOff x="0" y="0"/>
+          <a:chExt cx="0" cy="0"/>
+        </a:xfrm>
+      </p:grpSpPr>
+      <p:sp>
+        <p:nvSpPr>
+          <p:cNvPr id="2" name="Slide Image Placeholder 1"/>
+          <p:cNvSpPr>
+            <a:spLocks noGrp="1"/>
+          </p:cNvSpPr>
+          <p:nvPr>
+            <p:ph type="sldImg" idx="2"/>
+          </p:nvPr>
+        </p:nvSpPr>
+        <p:spPr/>
+      </p:sp>
+      <p:sp>
+        <p:nvSpPr>
+          <p:cNvPr id="3" name="Notes Placeholder 2"/>
+          <p:cNvSpPr>
+            <a:spLocks noGrp="1"/>
+          </p:cNvSpPr>
+          <p:nvPr>
+            <p:ph type="body" idx="3" sz="quarter"/>
+          </p:nvPr>
+        </p:nvSpPr>
+        <p:spPr/>
+        <p:txBody>
+          <a:bodyPr/>
+          <a:lstStyle/>
+          <a:p>
+            <a:r>
+              <a:t>Give students a few minutes to write an answer drawn from their own experience and career, then ask two or three to share. Connect their examples back to this seminar's content. In an online section, post the same question to the discussion board.</a:t>
             </a:r>
           </a:p>
         </p:txBody>
@@ -2572,6 +2643,167 @@
             <a:fld id="{F7021451-1387-4CA6-816F-3879F97B5CBC}" type="slidenum">
               <a:rPr b="0" lang="en-US"/>
               <a:t>6</a:t>
+            </a:fld>
+            <a:endParaRPr lang="en-US"/>
+          </a:p>
+        </p:txBody>
+      </p:sp>
+    </p:spTree>
+  </p:cSld>
+  <p:clrMapOvr>
+    <a:masterClrMapping/>
+  </p:clrMapOvr>
+</p:sld>
+</file>
+
+<file path=ppt/slides/slide7.xml><?xml version="1.0" encoding="utf-8"?>
+<p:sld xmlns:a="http://schemas.openxmlformats.org/drawingml/2006/main" xmlns:p="http://schemas.openxmlformats.org/presentationml/2006/main" xmlns:r="http://schemas.openxmlformats.org/officeDocument/2006/relationships">
+  <p:cSld>
+    <p:spTree>
+      <p:nvGrpSpPr>
+        <p:cNvPr id="1" name=""/>
+        <p:cNvGrpSpPr/>
+        <p:nvPr/>
+      </p:nvGrpSpPr>
+      <p:grpSpPr/>
+      <p:sp>
+        <p:nvSpPr>
+          <p:cNvPr id="2" name="Text 0"/>
+          <p:cNvSpPr/>
+          <p:nvPr>
+            <p:ph idx="100" type="title" hasCustomPrompt="1"/>
+          </p:nvPr>
+        </p:nvSpPr>
+        <p:spPr>
+          <a:xfrm>
+            <a:off x="731520" y="457200"/>
+            <a:ext cx="10698480" cy="822960"/>
+          </a:xfrm>
+          <a:prstGeom prst="rect">
+            <a:avLst/>
+          </a:prstGeom>
+          <a:noFill/>
+          <a:ln/>
+        </p:spPr>
+        <p:txBody>
+          <a:bodyPr wrap="square" lIns="0" tIns="0" rIns="0" bIns="0" rtlCol="0" anchor="t"/>
+          <a:lstStyle/>
+          <a:p>
+            <a:pPr algn="l" indent="0" marL="0">
+              <a:buNone/>
+            </a:pPr>
+            <a:r>
+              <a:rPr lang="en-US" sz="3200" b="1" dirty="0">
+                <a:solidFill>
+                  <a:srgbClr val="FFFFFF"/>
+                </a:solidFill>
+              </a:rPr>
+              <a:t>Discussion</a:t>
+            </a:r>
+            <a:endParaRPr lang="en-US" sz="3200" dirty="0"/>
+          </a:p>
+        </p:txBody>
+      </p:sp>
+      <p:sp>
+        <p:nvSpPr>
+          <p:cNvPr id="3" name="Text 0"/>
+          <p:cNvSpPr/>
+          <p:nvPr>
+            <p:ph idx="101" type="body" hasCustomPrompt="1"/>
+          </p:nvPr>
+        </p:nvSpPr>
+        <p:spPr>
+          <a:xfrm>
+            <a:off x="731520" y="1554480"/>
+            <a:ext cx="10698480" cy="4754880"/>
+          </a:xfrm>
+          <a:prstGeom prst="rect">
+            <a:avLst/>
+          </a:prstGeom>
+          <a:noFill/>
+          <a:ln/>
+        </p:spPr>
+        <p:txBody>
+          <a:bodyPr wrap="square" rtlCol="0" anchor="t"/>
+          <a:lstStyle/>
+          <a:p>
+            <a:pPr algn="l" marL="342900" indent="-342900">
+              <a:spcAft>
+                <a:spcPts val="1000"/>
+              </a:spcAft>
+              <a:buSzPct val="100000"/>
+              <a:buChar char="•"/>
+            </a:pPr>
+            <a:r>
+              <a:rPr lang="en-US" sz="2400" dirty="0">
+                <a:solidFill>
+                  <a:srgbClr val="FFFFFF"/>
+                </a:solidFill>
+              </a:rPr>
+              <a:t>If your team or practice were ranked on a scorecard tomorrow, what data problem would make the ranking unfair, and how would you fix it?</a:t>
+            </a:r>
+            <a:endParaRPr lang="en-US" sz="2400" dirty="0"/>
+          </a:p>
+          <a:p>
+            <a:pPr algn="l" marL="342900" indent="-342900">
+              <a:spcAft>
+                <a:spcPts val="1000"/>
+              </a:spcAft>
+              <a:buSzPct val="100000"/>
+              <a:buChar char="•"/>
+            </a:pPr>
+            <a:r>
+              <a:rPr lang="en-US" sz="2400" dirty="0">
+                <a:solidFill>
+                  <a:srgbClr val="FFFFFF"/>
+                </a:solidFill>
+              </a:rPr>
+              <a:t>Draw on your own experience and career, and apply today's seminar to that setting.</a:t>
+            </a:r>
+            <a:endParaRPr lang="en-US" sz="2400" dirty="0"/>
+          </a:p>
+        </p:txBody>
+      </p:sp>
+      <p:sp>
+        <p:nvSpPr>
+          <p:cNvPr id="25" name="Slide Number Placeholder 0"/>
+          <p:cNvSpPr>
+            <a:spLocks noGrp="1"/>
+          </p:cNvSpPr>
+          <p:nvPr>
+            <p:ph type="sldNum" sz="quarter" idx="4294967295"/>
+          </p:nvPr>
+        </p:nvSpPr>
+        <p:spPr>
+          <a:xfrm>
+            <a:off x="10972800" y="6400800"/>
+            <a:ext cx="548640" cy="274320"/>
+          </a:xfrm>
+          <a:prstGeom prst="rect">
+            <a:avLst/>
+          </a:prstGeom>
+          <a:extLst>
+            <a:ext uri="{C572A759-6A51-4108-AA02-DFA0A04FC94B}">
+              <ma14:wrappingTextBoxFlag xmlns:ma14="http://schemas.microsoft.com/office/mac/drawingml/2011/main" val="0"/>
+            </a:ext>
+          </a:extLst>
+        </p:spPr>
+        <p:txBody>
+          <a:bodyPr/>
+          <a:lstStyle>
+            <a:lvl1pPr>
+              <a:defRPr sz="1000">
+                <a:solidFill>
+                  <a:srgbClr val="BFBFBF"/>
+                </a:solidFill>
+              </a:defRPr>
+            </a:lvl1pPr>
+          </a:lstStyle>
+          <a:p>
+            <a:pPr algn="r"/>
+            <a:fld id="{F7021451-1387-4CA6-816F-3879F97B5CBC}" type="slidenum">
+              <a:rPr b="0" lang="en-US"/>
+              <a:t>7</a:t>
             </a:fld>
             <a:endParaRPr lang="en-US"/>
           </a:p>

--- a/domain-seminars/week07_vbp_data_management.pptx
+++ b/domain-seminars/week07_vbp_data_management.pptx
@@ -1619,7 +1619,7 @@
                   <a:srgbClr val="FFFFFF"/>
                 </a:solidFill>
               </a:rPr>
-              <a:t>Why VBP Data Management is So Difficult</a:t>
+              <a:t>Week 7: Why VBP Data Management is So Difficult</a:t>
             </a:r>
             <a:endParaRPr lang="en-US" sz="4000" dirty="0"/>
           </a:p>
